--- a/What is dacpac-DBAVUG.pptx
+++ b/What is dacpac-DBAVUG.pptx
@@ -6,23 +6,27 @@
   </p:sldMasterIdLst>
   <p:sldIdLst>
     <p:sldId id="256" r:id="rId2"/>
-    <p:sldId id="257" r:id="rId3"/>
-    <p:sldId id="263" r:id="rId4"/>
-    <p:sldId id="259" r:id="rId5"/>
-    <p:sldId id="262" r:id="rId6"/>
-    <p:sldId id="267" r:id="rId7"/>
-    <p:sldId id="258" r:id="rId8"/>
-    <p:sldId id="268" r:id="rId9"/>
-    <p:sldId id="260" r:id="rId10"/>
-    <p:sldId id="269" r:id="rId11"/>
-    <p:sldId id="273" r:id="rId12"/>
-    <p:sldId id="261" r:id="rId13"/>
-    <p:sldId id="272" r:id="rId14"/>
-    <p:sldId id="270" r:id="rId15"/>
-    <p:sldId id="271" r:id="rId16"/>
-    <p:sldId id="265" r:id="rId17"/>
-    <p:sldId id="264" r:id="rId18"/>
-    <p:sldId id="266" r:id="rId19"/>
+    <p:sldId id="287" r:id="rId3"/>
+    <p:sldId id="257" r:id="rId4"/>
+    <p:sldId id="263" r:id="rId5"/>
+    <p:sldId id="259" r:id="rId6"/>
+    <p:sldId id="262" r:id="rId7"/>
+    <p:sldId id="267" r:id="rId8"/>
+    <p:sldId id="258" r:id="rId9"/>
+    <p:sldId id="268" r:id="rId10"/>
+    <p:sldId id="260" r:id="rId11"/>
+    <p:sldId id="269" r:id="rId12"/>
+    <p:sldId id="273" r:id="rId13"/>
+    <p:sldId id="261" r:id="rId14"/>
+    <p:sldId id="272" r:id="rId15"/>
+    <p:sldId id="270" r:id="rId16"/>
+    <p:sldId id="274" r:id="rId17"/>
+    <p:sldId id="271" r:id="rId18"/>
+    <p:sldId id="265" r:id="rId19"/>
+    <p:sldId id="264" r:id="rId20"/>
+    <p:sldId id="266" r:id="rId21"/>
+    <p:sldId id="284" r:id="rId22"/>
+    <p:sldId id="286" r:id="rId23"/>
   </p:sldIdLst>
   <p:sldSz cx="12192000" cy="6858000"/>
   <p:notesSz cx="6858000" cy="9144000"/>
@@ -634,54 +638,6 @@
     </pc:docChg>
   </pc:docChgLst>
   <pc:docChgLst>
-    <pc:chgData name="Erik Ejlskov Jensen (Delegate)" userId="4aa40976-d7c6-47fa-b4ba-cf0621f5de0c" providerId="ADAL" clId="{8C14F93C-AE0D-46E6-BB57-9299CDA5752A}"/>
-    <pc:docChg chg="modSld">
-      <pc:chgData name="Erik Ejlskov Jensen (Delegate)" userId="4aa40976-d7c6-47fa-b4ba-cf0621f5de0c" providerId="ADAL" clId="{8C14F93C-AE0D-46E6-BB57-9299CDA5752A}" dt="2022-11-17T14:50:31.292" v="10" actId="14100"/>
-      <pc:docMkLst>
-        <pc:docMk/>
-      </pc:docMkLst>
-      <pc:sldChg chg="addSp delSp modSp mod">
-        <pc:chgData name="Erik Ejlskov Jensen (Delegate)" userId="4aa40976-d7c6-47fa-b4ba-cf0621f5de0c" providerId="ADAL" clId="{8C14F93C-AE0D-46E6-BB57-9299CDA5752A}" dt="2022-11-17T14:50:31.292" v="10" actId="14100"/>
-        <pc:sldMkLst>
-          <pc:docMk/>
-          <pc:sldMk cId="3970507168" sldId="266"/>
-        </pc:sldMkLst>
-        <pc:spChg chg="mod">
-          <ac:chgData name="Erik Ejlskov Jensen (Delegate)" userId="4aa40976-d7c6-47fa-b4ba-cf0621f5de0c" providerId="ADAL" clId="{8C14F93C-AE0D-46E6-BB57-9299CDA5752A}" dt="2022-11-17T14:50:31.292" v="10" actId="14100"/>
-          <ac:spMkLst>
-            <pc:docMk/>
-            <pc:sldMk cId="3970507168" sldId="266"/>
-            <ac:spMk id="3" creationId="{1D37BAAB-2AC4-7032-7DAE-B031E2D35A0C}"/>
-          </ac:spMkLst>
-        </pc:spChg>
-        <pc:picChg chg="add del">
-          <ac:chgData name="Erik Ejlskov Jensen (Delegate)" userId="4aa40976-d7c6-47fa-b4ba-cf0621f5de0c" providerId="ADAL" clId="{8C14F93C-AE0D-46E6-BB57-9299CDA5752A}" dt="2022-11-17T14:50:09.164" v="3"/>
-          <ac:picMkLst>
-            <pc:docMk/>
-            <pc:sldMk cId="3970507168" sldId="266"/>
-            <ac:picMk id="4" creationId="{316C5EFB-65B2-6435-969F-08EC794859BD}"/>
-          </ac:picMkLst>
-        </pc:picChg>
-        <pc:picChg chg="add del">
-          <ac:chgData name="Erik Ejlskov Jensen (Delegate)" userId="4aa40976-d7c6-47fa-b4ba-cf0621f5de0c" providerId="ADAL" clId="{8C14F93C-AE0D-46E6-BB57-9299CDA5752A}" dt="2022-11-17T14:50:15.410" v="5" actId="478"/>
-          <ac:picMkLst>
-            <pc:docMk/>
-            <pc:sldMk cId="3970507168" sldId="266"/>
-            <ac:picMk id="1026" creationId="{1345D517-B95E-08ED-3A50-F837FD734A34}"/>
-          </ac:picMkLst>
-        </pc:picChg>
-        <pc:picChg chg="add mod">
-          <ac:chgData name="Erik Ejlskov Jensen (Delegate)" userId="4aa40976-d7c6-47fa-b4ba-cf0621f5de0c" providerId="ADAL" clId="{8C14F93C-AE0D-46E6-BB57-9299CDA5752A}" dt="2022-11-17T14:50:26.941" v="9" actId="1076"/>
-          <ac:picMkLst>
-            <pc:docMk/>
-            <pc:sldMk cId="3970507168" sldId="266"/>
-            <ac:picMk id="1028" creationId="{672BB7EB-32D7-CC82-0F37-1B439A402A01}"/>
-          </ac:picMkLst>
-        </pc:picChg>
-      </pc:sldChg>
-    </pc:docChg>
-  </pc:docChgLst>
-  <pc:docChgLst>
     <pc:chgData name="Erik Ejlskov Jensen (Delegate)" userId="4aa40976-d7c6-47fa-b4ba-cf0621f5de0c" providerId="ADAL" clId="{96FCF2EA-F705-47F0-9DB5-E3BB9C457B4E}"/>
     <pc:docChg chg="custSel addSld modSld sldOrd">
       <pc:chgData name="Erik Ejlskov Jensen (Delegate)" userId="4aa40976-d7c6-47fa-b4ba-cf0621f5de0c" providerId="ADAL" clId="{96FCF2EA-F705-47F0-9DB5-E3BB9C457B4E}" dt="2022-11-11T07:16:11.678" v="303" actId="20577"/>
@@ -809,6 +765,54 @@
             <ac:spMk id="3" creationId="{B366DB99-25E1-988A-1438-1D73FE798176}"/>
           </ac:spMkLst>
         </pc:spChg>
+      </pc:sldChg>
+    </pc:docChg>
+  </pc:docChgLst>
+  <pc:docChgLst>
+    <pc:chgData name="Erik Ejlskov Jensen (Delegate)" userId="4aa40976-d7c6-47fa-b4ba-cf0621f5de0c" providerId="ADAL" clId="{8C14F93C-AE0D-46E6-BB57-9299CDA5752A}"/>
+    <pc:docChg chg="modSld">
+      <pc:chgData name="Erik Ejlskov Jensen (Delegate)" userId="4aa40976-d7c6-47fa-b4ba-cf0621f5de0c" providerId="ADAL" clId="{8C14F93C-AE0D-46E6-BB57-9299CDA5752A}" dt="2022-11-17T14:50:31.292" v="10" actId="14100"/>
+      <pc:docMkLst>
+        <pc:docMk/>
+      </pc:docMkLst>
+      <pc:sldChg chg="addSp delSp modSp mod">
+        <pc:chgData name="Erik Ejlskov Jensen (Delegate)" userId="4aa40976-d7c6-47fa-b4ba-cf0621f5de0c" providerId="ADAL" clId="{8C14F93C-AE0D-46E6-BB57-9299CDA5752A}" dt="2022-11-17T14:50:31.292" v="10" actId="14100"/>
+        <pc:sldMkLst>
+          <pc:docMk/>
+          <pc:sldMk cId="3970507168" sldId="266"/>
+        </pc:sldMkLst>
+        <pc:spChg chg="mod">
+          <ac:chgData name="Erik Ejlskov Jensen (Delegate)" userId="4aa40976-d7c6-47fa-b4ba-cf0621f5de0c" providerId="ADAL" clId="{8C14F93C-AE0D-46E6-BB57-9299CDA5752A}" dt="2022-11-17T14:50:31.292" v="10" actId="14100"/>
+          <ac:spMkLst>
+            <pc:docMk/>
+            <pc:sldMk cId="3970507168" sldId="266"/>
+            <ac:spMk id="3" creationId="{1D37BAAB-2AC4-7032-7DAE-B031E2D35A0C}"/>
+          </ac:spMkLst>
+        </pc:spChg>
+        <pc:picChg chg="add del">
+          <ac:chgData name="Erik Ejlskov Jensen (Delegate)" userId="4aa40976-d7c6-47fa-b4ba-cf0621f5de0c" providerId="ADAL" clId="{8C14F93C-AE0D-46E6-BB57-9299CDA5752A}" dt="2022-11-17T14:50:09.164" v="3"/>
+          <ac:picMkLst>
+            <pc:docMk/>
+            <pc:sldMk cId="3970507168" sldId="266"/>
+            <ac:picMk id="4" creationId="{316C5EFB-65B2-6435-969F-08EC794859BD}"/>
+          </ac:picMkLst>
+        </pc:picChg>
+        <pc:picChg chg="add del">
+          <ac:chgData name="Erik Ejlskov Jensen (Delegate)" userId="4aa40976-d7c6-47fa-b4ba-cf0621f5de0c" providerId="ADAL" clId="{8C14F93C-AE0D-46E6-BB57-9299CDA5752A}" dt="2022-11-17T14:50:15.410" v="5" actId="478"/>
+          <ac:picMkLst>
+            <pc:docMk/>
+            <pc:sldMk cId="3970507168" sldId="266"/>
+            <ac:picMk id="1026" creationId="{1345D517-B95E-08ED-3A50-F837FD734A34}"/>
+          </ac:picMkLst>
+        </pc:picChg>
+        <pc:picChg chg="add mod">
+          <ac:chgData name="Erik Ejlskov Jensen (Delegate)" userId="4aa40976-d7c6-47fa-b4ba-cf0621f5de0c" providerId="ADAL" clId="{8C14F93C-AE0D-46E6-BB57-9299CDA5752A}" dt="2022-11-17T14:50:26.941" v="9" actId="1076"/>
+          <ac:picMkLst>
+            <pc:docMk/>
+            <pc:sldMk cId="3970507168" sldId="266"/>
+            <ac:picMk id="1028" creationId="{672BB7EB-32D7-CC82-0F37-1B439A402A01}"/>
+          </ac:picMkLst>
+        </pc:picChg>
       </pc:sldChg>
     </pc:docChg>
   </pc:docChgLst>
@@ -20021,7 +20025,7 @@
           <a:p>
             <a:fld id="{91657688-1732-450D-B4AF-D7204A53403A}" type="datetimeFigureOut">
               <a:rPr lang="da-DK" smtClean="0"/>
-              <a:t>21-04-2026</a:t>
+              <a:t>22-04-2026</a:t>
             </a:fld>
             <a:endParaRPr lang="da-DK"/>
           </a:p>
@@ -20221,7 +20225,7 @@
           <a:p>
             <a:fld id="{91657688-1732-450D-B4AF-D7204A53403A}" type="datetimeFigureOut">
               <a:rPr lang="da-DK" smtClean="0"/>
-              <a:t>21-04-2026</a:t>
+              <a:t>22-04-2026</a:t>
             </a:fld>
             <a:endParaRPr lang="da-DK"/>
           </a:p>
@@ -20431,7 +20435,7 @@
           <a:p>
             <a:fld id="{91657688-1732-450D-B4AF-D7204A53403A}" type="datetimeFigureOut">
               <a:rPr lang="da-DK" smtClean="0"/>
-              <a:t>21-04-2026</a:t>
+              <a:t>22-04-2026</a:t>
             </a:fld>
             <a:endParaRPr lang="da-DK"/>
           </a:p>
@@ -20631,7 +20635,7 @@
           <a:p>
             <a:fld id="{91657688-1732-450D-B4AF-D7204A53403A}" type="datetimeFigureOut">
               <a:rPr lang="da-DK" smtClean="0"/>
-              <a:t>21-04-2026</a:t>
+              <a:t>22-04-2026</a:t>
             </a:fld>
             <a:endParaRPr lang="da-DK"/>
           </a:p>
@@ -20907,7 +20911,7 @@
           <a:p>
             <a:fld id="{91657688-1732-450D-B4AF-D7204A53403A}" type="datetimeFigureOut">
               <a:rPr lang="da-DK" smtClean="0"/>
-              <a:t>21-04-2026</a:t>
+              <a:t>22-04-2026</a:t>
             </a:fld>
             <a:endParaRPr lang="da-DK"/>
           </a:p>
@@ -21175,7 +21179,7 @@
           <a:p>
             <a:fld id="{91657688-1732-450D-B4AF-D7204A53403A}" type="datetimeFigureOut">
               <a:rPr lang="da-DK" smtClean="0"/>
-              <a:t>21-04-2026</a:t>
+              <a:t>22-04-2026</a:t>
             </a:fld>
             <a:endParaRPr lang="da-DK"/>
           </a:p>
@@ -21590,7 +21594,7 @@
           <a:p>
             <a:fld id="{91657688-1732-450D-B4AF-D7204A53403A}" type="datetimeFigureOut">
               <a:rPr lang="da-DK" smtClean="0"/>
-              <a:t>21-04-2026</a:t>
+              <a:t>22-04-2026</a:t>
             </a:fld>
             <a:endParaRPr lang="da-DK"/>
           </a:p>
@@ -21732,7 +21736,7 @@
           <a:p>
             <a:fld id="{91657688-1732-450D-B4AF-D7204A53403A}" type="datetimeFigureOut">
               <a:rPr lang="da-DK" smtClean="0"/>
-              <a:t>21-04-2026</a:t>
+              <a:t>22-04-2026</a:t>
             </a:fld>
             <a:endParaRPr lang="da-DK"/>
           </a:p>
@@ -21845,7 +21849,7 @@
           <a:p>
             <a:fld id="{91657688-1732-450D-B4AF-D7204A53403A}" type="datetimeFigureOut">
               <a:rPr lang="da-DK" smtClean="0"/>
-              <a:t>21-04-2026</a:t>
+              <a:t>22-04-2026</a:t>
             </a:fld>
             <a:endParaRPr lang="da-DK"/>
           </a:p>
@@ -22158,7 +22162,7 @@
           <a:p>
             <a:fld id="{91657688-1732-450D-B4AF-D7204A53403A}" type="datetimeFigureOut">
               <a:rPr lang="da-DK" smtClean="0"/>
-              <a:t>21-04-2026</a:t>
+              <a:t>22-04-2026</a:t>
             </a:fld>
             <a:endParaRPr lang="da-DK"/>
           </a:p>
@@ -22447,7 +22451,7 @@
           <a:p>
             <a:fld id="{91657688-1732-450D-B4AF-D7204A53403A}" type="datetimeFigureOut">
               <a:rPr lang="da-DK" smtClean="0"/>
-              <a:t>21-04-2026</a:t>
+              <a:t>22-04-2026</a:t>
             </a:fld>
             <a:endParaRPr lang="da-DK"/>
           </a:p>
@@ -22690,7 +22694,7 @@
           <a:p>
             <a:fld id="{91657688-1732-450D-B4AF-D7204A53403A}" type="datetimeFigureOut">
               <a:rPr lang="da-DK" smtClean="0"/>
-              <a:t>21-04-2026</a:t>
+              <a:t>22-04-2026</a:t>
             </a:fld>
             <a:endParaRPr lang="da-DK"/>
           </a:p>
@@ -23206,6 +23210,111 @@
           <p:cNvPr id="2" name="Title 1">
             <a:extLst>
               <a:ext uri="{FF2B5EF4-FFF2-40B4-BE49-F238E27FC236}">
+                <a16:creationId xmlns:a16="http://schemas.microsoft.com/office/drawing/2014/main" id="{E3403FCE-6728-50EF-4711-490852A5B2F1}"/>
+              </a:ext>
+            </a:extLst>
+          </p:cNvPr>
+          <p:cNvSpPr>
+            <a:spLocks noGrp="1"/>
+          </p:cNvSpPr>
+          <p:nvPr>
+            <p:ph type="title"/>
+          </p:nvPr>
+        </p:nvSpPr>
+        <p:spPr/>
+        <p:txBody>
+          <a:bodyPr/>
+          <a:lstStyle/>
+          <a:p>
+            <a:r>
+              <a:rPr lang="da-DK" dirty="0"/>
+              <a:t>Authoring</a:t>
+            </a:r>
+          </a:p>
+        </p:txBody>
+      </p:sp>
+      <p:sp>
+        <p:nvSpPr>
+          <p:cNvPr id="3" name="Content Placeholder 2">
+            <a:extLst>
+              <a:ext uri="{FF2B5EF4-FFF2-40B4-BE49-F238E27FC236}">
+                <a16:creationId xmlns:a16="http://schemas.microsoft.com/office/drawing/2014/main" id="{72E47B84-5EF3-4B0A-82B3-22C34297B1BE}"/>
+              </a:ext>
+            </a:extLst>
+          </p:cNvPr>
+          <p:cNvSpPr>
+            <a:spLocks noGrp="1"/>
+          </p:cNvSpPr>
+          <p:nvPr>
+            <p:ph idx="1"/>
+          </p:nvPr>
+        </p:nvSpPr>
+        <p:spPr/>
+        <p:txBody>
+          <a:bodyPr/>
+          <a:lstStyle/>
+          <a:p>
+            <a:r>
+              <a:rPr lang="da-DK" dirty="0"/>
+              <a:t>SSMS .</a:t>
+            </a:r>
+            <a:r>
+              <a:rPr lang="da-DK" dirty="0" err="1"/>
+              <a:t>sqlproj</a:t>
+            </a:r>
+            <a:endParaRPr lang="da-DK" dirty="0"/>
+          </a:p>
+          <a:p>
+            <a:r>
+              <a:rPr lang="da-DK" dirty="0"/>
+              <a:t>Demo (import, properties, </a:t>
+            </a:r>
+            <a:r>
+              <a:rPr lang="da-DK" dirty="0" err="1"/>
+              <a:t>build</a:t>
+            </a:r>
+            <a:r>
+              <a:rPr lang="da-DK" dirty="0"/>
+              <a:t>)</a:t>
+            </a:r>
+          </a:p>
+        </p:txBody>
+      </p:sp>
+    </p:spTree>
+    <p:extLst>
+      <p:ext uri="{BB962C8B-B14F-4D97-AF65-F5344CB8AC3E}">
+        <p14:creationId xmlns:p14="http://schemas.microsoft.com/office/powerpoint/2010/main" val="641704741"/>
+      </p:ext>
+    </p:extLst>
+  </p:cSld>
+  <p:clrMapOvr>
+    <a:masterClrMapping/>
+  </p:clrMapOvr>
+</p:sld>
+</file>
+
+<file path=ppt/slides/slide11.xml><?xml version="1.0" encoding="utf-8"?>
+<p:sld xmlns:a="http://schemas.openxmlformats.org/drawingml/2006/main" xmlns:r="http://schemas.openxmlformats.org/officeDocument/2006/relationships" xmlns:p="http://schemas.openxmlformats.org/presentationml/2006/main">
+  <p:cSld>
+    <p:spTree>
+      <p:nvGrpSpPr>
+        <p:cNvPr id="1" name=""/>
+        <p:cNvGrpSpPr/>
+        <p:nvPr/>
+      </p:nvGrpSpPr>
+      <p:grpSpPr>
+        <a:xfrm>
+          <a:off x="0" y="0"/>
+          <a:ext cx="0" cy="0"/>
+          <a:chOff x="0" y="0"/>
+          <a:chExt cx="0" cy="0"/>
+        </a:xfrm>
+      </p:grpSpPr>
+      <p:sp>
+        <p:nvSpPr>
+          <p:cNvPr id="2" name="Title 1">
+            <a:extLst>
+              <a:ext uri="{FF2B5EF4-FFF2-40B4-BE49-F238E27FC236}">
                 <a16:creationId xmlns:a16="http://schemas.microsoft.com/office/drawing/2014/main" id="{B0D5BB5B-7FFA-DB8B-F802-03B5D520D180}"/>
               </a:ext>
             </a:extLst>
@@ -23320,7 +23429,7 @@
 </p:sld>
 </file>
 
-<file path=ppt/slides/slide11.xml><?xml version="1.0" encoding="utf-8"?>
+<file path=ppt/slides/slide12.xml><?xml version="1.0" encoding="utf-8"?>
 <p:sld xmlns:a="http://schemas.openxmlformats.org/drawingml/2006/main" xmlns:r="http://schemas.openxmlformats.org/officeDocument/2006/relationships" xmlns:p="http://schemas.openxmlformats.org/presentationml/2006/main">
   <p:cSld>
     <p:spTree>
@@ -23455,7 +23564,7 @@
 </p:sld>
 </file>
 
-<file path=ppt/slides/slide12.xml><?xml version="1.0" encoding="utf-8"?>
+<file path=ppt/slides/slide13.xml><?xml version="1.0" encoding="utf-8"?>
 <p:sld xmlns:a="http://schemas.openxmlformats.org/drawingml/2006/main" xmlns:r="http://schemas.openxmlformats.org/officeDocument/2006/relationships" xmlns:p="http://schemas.openxmlformats.org/presentationml/2006/main">
   <p:cSld>
     <p:spTree>
@@ -23587,7 +23696,7 @@
 </p:sld>
 </file>
 
-<file path=ppt/slides/slide13.xml><?xml version="1.0" encoding="utf-8"?>
+<file path=ppt/slides/slide14.xml><?xml version="1.0" encoding="utf-8"?>
 <p:sld xmlns:a="http://schemas.openxmlformats.org/drawingml/2006/main" xmlns:r="http://schemas.openxmlformats.org/officeDocument/2006/relationships" xmlns:p="http://schemas.openxmlformats.org/presentationml/2006/main">
   <p:cSld>
     <p:spTree>
@@ -23717,7 +23826,7 @@
 </p:sld>
 </file>
 
-<file path=ppt/slides/slide14.xml><?xml version="1.0" encoding="utf-8"?>
+<file path=ppt/slides/slide15.xml><?xml version="1.0" encoding="utf-8"?>
 <p:sld xmlns:a="http://schemas.openxmlformats.org/drawingml/2006/main" xmlns:r="http://schemas.openxmlformats.org/officeDocument/2006/relationships" xmlns:p="http://schemas.openxmlformats.org/presentationml/2006/main">
   <p:cSld>
     <p:spTree>
@@ -23900,7 +24009,136 @@
 </p:sld>
 </file>
 
-<file path=ppt/slides/slide15.xml><?xml version="1.0" encoding="utf-8"?>
+<file path=ppt/slides/slide16.xml><?xml version="1.0" encoding="utf-8"?>
+<p:sld xmlns:a="http://schemas.openxmlformats.org/drawingml/2006/main" xmlns:r="http://schemas.openxmlformats.org/officeDocument/2006/relationships" xmlns:p="http://schemas.openxmlformats.org/presentationml/2006/main">
+  <p:cSld>
+    <p:spTree>
+      <p:nvGrpSpPr>
+        <p:cNvPr id="1" name="">
+          <a:extLst>
+            <a:ext uri="{FF2B5EF4-FFF2-40B4-BE49-F238E27FC236}">
+              <a16:creationId xmlns:a16="http://schemas.microsoft.com/office/drawing/2014/main" id="{84EF75DC-08C3-CC44-6906-15CB42B3F05C}"/>
+            </a:ext>
+          </a:extLst>
+        </p:cNvPr>
+        <p:cNvGrpSpPr/>
+        <p:nvPr/>
+      </p:nvGrpSpPr>
+      <p:grpSpPr>
+        <a:xfrm>
+          <a:off x="0" y="0"/>
+          <a:ext cx="0" cy="0"/>
+          <a:chOff x="0" y="0"/>
+          <a:chExt cx="0" cy="0"/>
+        </a:xfrm>
+      </p:grpSpPr>
+      <p:sp>
+        <p:nvSpPr>
+          <p:cNvPr id="2" name="Title 1">
+            <a:extLst>
+              <a:ext uri="{FF2B5EF4-FFF2-40B4-BE49-F238E27FC236}">
+                <a16:creationId xmlns:a16="http://schemas.microsoft.com/office/drawing/2014/main" id="{27F2377F-F8A5-7FEA-4D4E-3F84BBED1587}"/>
+              </a:ext>
+            </a:extLst>
+          </p:cNvPr>
+          <p:cNvSpPr>
+            <a:spLocks noGrp="1"/>
+          </p:cNvSpPr>
+          <p:nvPr>
+            <p:ph type="title"/>
+          </p:nvPr>
+        </p:nvSpPr>
+        <p:spPr/>
+        <p:txBody>
+          <a:bodyPr/>
+          <a:lstStyle/>
+          <a:p>
+            <a:r>
+              <a:rPr lang="da-DK" dirty="0" err="1"/>
+              <a:t>Taking</a:t>
+            </a:r>
+            <a:r>
+              <a:rPr lang="da-DK" dirty="0"/>
+              <a:t> </a:t>
+            </a:r>
+            <a:r>
+              <a:rPr lang="da-DK" dirty="0" err="1"/>
+              <a:t>advantage</a:t>
+            </a:r>
+            <a:r>
+              <a:rPr lang="da-DK" dirty="0"/>
+              <a:t> of the .</a:t>
+            </a:r>
+            <a:r>
+              <a:rPr lang="da-DK" dirty="0" err="1"/>
+              <a:t>dacpac</a:t>
+            </a:r>
+            <a:endParaRPr lang="da-DK" dirty="0"/>
+          </a:p>
+        </p:txBody>
+      </p:sp>
+      <p:sp>
+        <p:nvSpPr>
+          <p:cNvPr id="3" name="Content Placeholder 2">
+            <a:extLst>
+              <a:ext uri="{FF2B5EF4-FFF2-40B4-BE49-F238E27FC236}">
+                <a16:creationId xmlns:a16="http://schemas.microsoft.com/office/drawing/2014/main" id="{1C71D59E-9090-A2C0-DCCF-DC7519818C9D}"/>
+              </a:ext>
+            </a:extLst>
+          </p:cNvPr>
+          <p:cNvSpPr>
+            <a:spLocks noGrp="1"/>
+          </p:cNvSpPr>
+          <p:nvPr>
+            <p:ph idx="1"/>
+          </p:nvPr>
+        </p:nvSpPr>
+        <p:spPr/>
+        <p:txBody>
+          <a:bodyPr/>
+          <a:lstStyle/>
+          <a:p>
+            <a:r>
+              <a:rPr lang="da-DK" dirty="0"/>
+              <a:t>Demo</a:t>
+            </a:r>
+          </a:p>
+          <a:p>
+            <a:r>
+              <a:rPr lang="da-DK" dirty="0" err="1"/>
+              <a:t>Compare</a:t>
+            </a:r>
+            <a:endParaRPr lang="da-DK" dirty="0"/>
+          </a:p>
+          <a:p>
+            <a:r>
+              <a:rPr lang="da-DK" dirty="0" err="1"/>
+              <a:t>Analyze</a:t>
+            </a:r>
+            <a:endParaRPr lang="da-DK" dirty="0"/>
+          </a:p>
+          <a:p>
+            <a:r>
+              <a:rPr lang="da-DK" dirty="0"/>
+              <a:t>E-R Diagram</a:t>
+            </a:r>
+          </a:p>
+        </p:txBody>
+      </p:sp>
+    </p:spTree>
+    <p:extLst>
+      <p:ext uri="{BB962C8B-B14F-4D97-AF65-F5344CB8AC3E}">
+        <p14:creationId xmlns:p14="http://schemas.microsoft.com/office/powerpoint/2010/main" val="178100233"/>
+      </p:ext>
+    </p:extLst>
+  </p:cSld>
+  <p:clrMapOvr>
+    <a:masterClrMapping/>
+  </p:clrMapOvr>
+</p:sld>
+</file>
+
+<file path=ppt/slides/slide17.xml><?xml version="1.0" encoding="utf-8"?>
 <p:sld xmlns:a="http://schemas.openxmlformats.org/drawingml/2006/main" xmlns:r="http://schemas.openxmlformats.org/officeDocument/2006/relationships" xmlns:p="http://schemas.openxmlformats.org/presentationml/2006/main">
   <p:cSld>
     <p:spTree>
@@ -24031,7 +24269,7 @@
 </p:sld>
 </file>
 
-<file path=ppt/slides/slide16.xml><?xml version="1.0" encoding="utf-8"?>
+<file path=ppt/slides/slide18.xml><?xml version="1.0" encoding="utf-8"?>
 <p:sld xmlns:a="http://schemas.openxmlformats.org/drawingml/2006/main" xmlns:r="http://schemas.openxmlformats.org/officeDocument/2006/relationships" xmlns:p="http://schemas.openxmlformats.org/presentationml/2006/main">
   <p:cSld>
     <p:bg>
@@ -24378,7 +24616,7 @@
 </p:sld>
 </file>
 
-<file path=ppt/slides/slide17.xml><?xml version="1.0" encoding="utf-8"?>
+<file path=ppt/slides/slide19.xml><?xml version="1.0" encoding="utf-8"?>
 <p:sld xmlns:a="http://schemas.openxmlformats.org/drawingml/2006/main" xmlns:r="http://schemas.openxmlformats.org/officeDocument/2006/relationships" xmlns:p="http://schemas.openxmlformats.org/presentationml/2006/main">
   <p:cSld>
     <p:spTree>
@@ -24820,7 +25058,231 @@
 </p:sld>
 </file>
 
-<file path=ppt/slides/slide18.xml><?xml version="1.0" encoding="utf-8"?>
+<file path=ppt/slides/slide2.xml><?xml version="1.0" encoding="utf-8"?>
+<p:sld xmlns:a="http://schemas.openxmlformats.org/drawingml/2006/main" xmlns:r="http://schemas.openxmlformats.org/officeDocument/2006/relationships" xmlns:p="http://schemas.openxmlformats.org/presentationml/2006/main">
+  <p:cSld>
+    <p:bg>
+      <p:bgPr>
+        <a:solidFill>
+          <a:schemeClr val="bg1"/>
+        </a:solidFill>
+        <a:effectLst/>
+      </p:bgPr>
+    </p:bg>
+    <p:spTree>
+      <p:nvGrpSpPr>
+        <p:cNvPr id="1" name=""/>
+        <p:cNvGrpSpPr/>
+        <p:nvPr/>
+      </p:nvGrpSpPr>
+      <p:grpSpPr>
+        <a:xfrm>
+          <a:off x="0" y="0"/>
+          <a:ext cx="0" cy="0"/>
+          <a:chOff x="0" y="0"/>
+          <a:chExt cx="0" cy="0"/>
+        </a:xfrm>
+      </p:grpSpPr>
+      <p:sp>
+        <p:nvSpPr>
+          <p:cNvPr id="8" name="Rectangle 7">
+            <a:extLst>
+              <a:ext uri="{FF2B5EF4-FFF2-40B4-BE49-F238E27FC236}">
+                <a16:creationId xmlns:a16="http://schemas.microsoft.com/office/drawing/2014/main" id="{42A4FC2C-047E-45A5-965D-8E1E3BF09BC6}"/>
+              </a:ext>
+              <a:ext uri="{C183D7F6-B498-43B3-948B-1728B52AA6E4}">
+                <adec:decorative xmlns:adec="http://schemas.microsoft.com/office/drawing/2017/decorative" val="1"/>
+              </a:ext>
+            </a:extLst>
+          </p:cNvPr>
+          <p:cNvSpPr>
+            <a:spLocks noGrp="1" noRot="1" noChangeAspect="1" noMove="1" noResize="1" noEditPoints="1" noAdjustHandles="1" noChangeArrowheads="1" noChangeShapeType="1" noTextEdit="1"/>
+          </p:cNvSpPr>
+          <p:nvPr>
+            <p:extLst>
+              <p:ext uri="{386F3935-93C4-4BCD-93E2-E3B085C9AB24}">
+                <p16:designElem xmlns:p16="http://schemas.microsoft.com/office/powerpoint/2015/main" val="1"/>
+              </p:ext>
+            </p:extLst>
+          </p:nvPr>
+        </p:nvSpPr>
+        <p:spPr bwMode="white">
+          <a:xfrm>
+            <a:off x="1524" y="0"/>
+            <a:ext cx="12188952" cy="6858000"/>
+          </a:xfrm>
+          <a:prstGeom prst="rect">
+            <a:avLst/>
+          </a:prstGeom>
+          <a:noFill/>
+          <a:ln>
+            <a:noFill/>
+          </a:ln>
+        </p:spPr>
+        <p:style>
+          <a:lnRef idx="2">
+            <a:schemeClr val="accent1">
+              <a:shade val="50000"/>
+            </a:schemeClr>
+          </a:lnRef>
+          <a:fillRef idx="1">
+            <a:schemeClr val="accent1"/>
+          </a:fillRef>
+          <a:effectRef idx="0">
+            <a:schemeClr val="accent1"/>
+          </a:effectRef>
+          <a:fontRef idx="minor">
+            <a:schemeClr val="lt1"/>
+          </a:fontRef>
+        </p:style>
+        <p:txBody>
+          <a:bodyPr rtlCol="0" anchor="ctr"/>
+          <a:lstStyle>
+            <a:defPPr>
+              <a:defRPr lang="en-US"/>
+            </a:defPPr>
+            <a:lvl1pPr marL="0" algn="l" defTabSz="914400" rtl="0" eaLnBrk="1" latinLnBrk="0" hangingPunct="1">
+              <a:defRPr sz="1800" kern="1200">
+                <a:solidFill>
+                  <a:schemeClr val="lt1"/>
+                </a:solidFill>
+                <a:latin typeface="+mn-lt"/>
+                <a:ea typeface="+mn-ea"/>
+                <a:cs typeface="+mn-cs"/>
+              </a:defRPr>
+            </a:lvl1pPr>
+            <a:lvl2pPr marL="457200" algn="l" defTabSz="914400" rtl="0" eaLnBrk="1" latinLnBrk="0" hangingPunct="1">
+              <a:defRPr sz="1800" kern="1200">
+                <a:solidFill>
+                  <a:schemeClr val="lt1"/>
+                </a:solidFill>
+                <a:latin typeface="+mn-lt"/>
+                <a:ea typeface="+mn-ea"/>
+                <a:cs typeface="+mn-cs"/>
+              </a:defRPr>
+            </a:lvl2pPr>
+            <a:lvl3pPr marL="914400" algn="l" defTabSz="914400" rtl="0" eaLnBrk="1" latinLnBrk="0" hangingPunct="1">
+              <a:defRPr sz="1800" kern="1200">
+                <a:solidFill>
+                  <a:schemeClr val="lt1"/>
+                </a:solidFill>
+                <a:latin typeface="+mn-lt"/>
+                <a:ea typeface="+mn-ea"/>
+                <a:cs typeface="+mn-cs"/>
+              </a:defRPr>
+            </a:lvl3pPr>
+            <a:lvl4pPr marL="1371600" algn="l" defTabSz="914400" rtl="0" eaLnBrk="1" latinLnBrk="0" hangingPunct="1">
+              <a:defRPr sz="1800" kern="1200">
+                <a:solidFill>
+                  <a:schemeClr val="lt1"/>
+                </a:solidFill>
+                <a:latin typeface="+mn-lt"/>
+                <a:ea typeface="+mn-ea"/>
+                <a:cs typeface="+mn-cs"/>
+              </a:defRPr>
+            </a:lvl4pPr>
+            <a:lvl5pPr marL="1828800" algn="l" defTabSz="914400" rtl="0" eaLnBrk="1" latinLnBrk="0" hangingPunct="1">
+              <a:defRPr sz="1800" kern="1200">
+                <a:solidFill>
+                  <a:schemeClr val="lt1"/>
+                </a:solidFill>
+                <a:latin typeface="+mn-lt"/>
+                <a:ea typeface="+mn-ea"/>
+                <a:cs typeface="+mn-cs"/>
+              </a:defRPr>
+            </a:lvl5pPr>
+            <a:lvl6pPr marL="2286000" algn="l" defTabSz="914400" rtl="0" eaLnBrk="1" latinLnBrk="0" hangingPunct="1">
+              <a:defRPr sz="1800" kern="1200">
+                <a:solidFill>
+                  <a:schemeClr val="lt1"/>
+                </a:solidFill>
+                <a:latin typeface="+mn-lt"/>
+                <a:ea typeface="+mn-ea"/>
+                <a:cs typeface="+mn-cs"/>
+              </a:defRPr>
+            </a:lvl6pPr>
+            <a:lvl7pPr marL="2743200" algn="l" defTabSz="914400" rtl="0" eaLnBrk="1" latinLnBrk="0" hangingPunct="1">
+              <a:defRPr sz="1800" kern="1200">
+                <a:solidFill>
+                  <a:schemeClr val="lt1"/>
+                </a:solidFill>
+                <a:latin typeface="+mn-lt"/>
+                <a:ea typeface="+mn-ea"/>
+                <a:cs typeface="+mn-cs"/>
+              </a:defRPr>
+            </a:lvl7pPr>
+            <a:lvl8pPr marL="3200400" algn="l" defTabSz="914400" rtl="0" eaLnBrk="1" latinLnBrk="0" hangingPunct="1">
+              <a:defRPr sz="1800" kern="1200">
+                <a:solidFill>
+                  <a:schemeClr val="lt1"/>
+                </a:solidFill>
+                <a:latin typeface="+mn-lt"/>
+                <a:ea typeface="+mn-ea"/>
+                <a:cs typeface="+mn-cs"/>
+              </a:defRPr>
+            </a:lvl8pPr>
+            <a:lvl9pPr marL="3657600" algn="l" defTabSz="914400" rtl="0" eaLnBrk="1" latinLnBrk="0" hangingPunct="1">
+              <a:defRPr sz="1800" kern="1200">
+                <a:solidFill>
+                  <a:schemeClr val="lt1"/>
+                </a:solidFill>
+                <a:latin typeface="+mn-lt"/>
+                <a:ea typeface="+mn-ea"/>
+                <a:cs typeface="+mn-cs"/>
+              </a:defRPr>
+            </a:lvl9pPr>
+          </a:lstStyle>
+          <a:p>
+            <a:pPr algn="ctr"/>
+            <a:endParaRPr lang="en-US"/>
+          </a:p>
+        </p:txBody>
+      </p:sp>
+      <p:pic>
+        <p:nvPicPr>
+          <p:cNvPr id="3" name="Picture 2">
+            <a:extLst>
+              <a:ext uri="{FF2B5EF4-FFF2-40B4-BE49-F238E27FC236}">
+                <a16:creationId xmlns:a16="http://schemas.microsoft.com/office/drawing/2014/main" id="{0A673095-AB41-C0D4-6D14-BC8F02772128}"/>
+              </a:ext>
+            </a:extLst>
+          </p:cNvPr>
+          <p:cNvPicPr>
+            <a:picLocks noChangeAspect="1"/>
+          </p:cNvPicPr>
+          <p:nvPr/>
+        </p:nvPicPr>
+        <p:blipFill>
+          <a:blip r:embed="rId2"/>
+          <a:srcRect b="19080"/>
+          <a:stretch>
+            <a:fillRect/>
+          </a:stretch>
+        </p:blipFill>
+        <p:spPr>
+          <a:xfrm>
+            <a:off x="20" y="1282"/>
+            <a:ext cx="12191980" cy="6856718"/>
+          </a:xfrm>
+          <a:prstGeom prst="rect">
+            <a:avLst/>
+          </a:prstGeom>
+        </p:spPr>
+      </p:pic>
+    </p:spTree>
+    <p:extLst>
+      <p:ext uri="{BB962C8B-B14F-4D97-AF65-F5344CB8AC3E}">
+        <p14:creationId xmlns:p14="http://schemas.microsoft.com/office/powerpoint/2010/main" val="3745867778"/>
+      </p:ext>
+    </p:extLst>
+  </p:cSld>
+  <p:clrMapOvr>
+    <a:masterClrMapping/>
+  </p:clrMapOvr>
+</p:sld>
+</file>
+
+<file path=ppt/slides/slide20.xml><?xml version="1.0" encoding="utf-8"?>
 <p:sld xmlns:a="http://schemas.openxmlformats.org/drawingml/2006/main" xmlns:r="http://schemas.openxmlformats.org/officeDocument/2006/relationships" xmlns:p="http://schemas.openxmlformats.org/presentationml/2006/main">
   <p:cSld>
     <p:bg>
@@ -25453,7 +25915,456 @@
 </p:sld>
 </file>
 
-<file path=ppt/slides/slide2.xml><?xml version="1.0" encoding="utf-8"?>
+<file path=ppt/slides/slide21.xml><?xml version="1.0" encoding="utf-8"?>
+<p:sld xmlns:a="http://schemas.openxmlformats.org/drawingml/2006/main" xmlns:r="http://schemas.openxmlformats.org/officeDocument/2006/relationships" xmlns:p="http://schemas.openxmlformats.org/presentationml/2006/main">
+  <p:cSld>
+    <p:spTree>
+      <p:nvGrpSpPr>
+        <p:cNvPr id="1" name="">
+          <a:extLst>
+            <a:ext uri="{FF2B5EF4-FFF2-40B4-BE49-F238E27FC236}">
+              <a16:creationId xmlns:a16="http://schemas.microsoft.com/office/drawing/2014/main" id="{A0EBBA3D-1D4D-7E61-1738-8D5A6CFDAD91}"/>
+            </a:ext>
+          </a:extLst>
+        </p:cNvPr>
+        <p:cNvGrpSpPr/>
+        <p:nvPr/>
+      </p:nvGrpSpPr>
+      <p:grpSpPr>
+        <a:xfrm>
+          <a:off x="0" y="0"/>
+          <a:ext cx="0" cy="0"/>
+          <a:chOff x="0" y="0"/>
+          <a:chExt cx="0" cy="0"/>
+        </a:xfrm>
+      </p:grpSpPr>
+      <p:sp>
+        <p:nvSpPr>
+          <p:cNvPr id="2" name="Title 1">
+            <a:extLst>
+              <a:ext uri="{FF2B5EF4-FFF2-40B4-BE49-F238E27FC236}">
+                <a16:creationId xmlns:a16="http://schemas.microsoft.com/office/drawing/2014/main" id="{06BAE2BC-381C-A57E-FCAD-277D509EECB8}"/>
+              </a:ext>
+            </a:extLst>
+          </p:cNvPr>
+          <p:cNvSpPr>
+            <a:spLocks noGrp="1"/>
+          </p:cNvSpPr>
+          <p:nvPr>
+            <p:ph type="title"/>
+          </p:nvPr>
+        </p:nvSpPr>
+        <p:spPr/>
+        <p:txBody>
+          <a:bodyPr/>
+          <a:lstStyle/>
+          <a:p>
+            <a:r>
+              <a:rPr lang="da-DK"/>
+              <a:t>Q  &amp; A</a:t>
+            </a:r>
+            <a:endParaRPr lang="da-DK" dirty="0"/>
+          </a:p>
+        </p:txBody>
+      </p:sp>
+      <p:pic>
+        <p:nvPicPr>
+          <p:cNvPr id="5" name="Content Placeholder 4">
+            <a:extLst>
+              <a:ext uri="{FF2B5EF4-FFF2-40B4-BE49-F238E27FC236}">
+                <a16:creationId xmlns:a16="http://schemas.microsoft.com/office/drawing/2014/main" id="{A59D8A4D-BC32-FCB3-F0F4-F3C435D72A5E}"/>
+              </a:ext>
+            </a:extLst>
+          </p:cNvPr>
+          <p:cNvPicPr>
+            <a:picLocks noGrp="1" noChangeAspect="1"/>
+          </p:cNvPicPr>
+          <p:nvPr>
+            <p:ph idx="1"/>
+          </p:nvPr>
+        </p:nvPicPr>
+        <p:blipFill>
+          <a:blip r:embed="rId2"/>
+          <a:stretch>
+            <a:fillRect/>
+          </a:stretch>
+        </p:blipFill>
+        <p:spPr>
+          <a:xfrm>
+            <a:off x="2874317" y="1916599"/>
+            <a:ext cx="6669580" cy="3930082"/>
+          </a:xfrm>
+        </p:spPr>
+      </p:pic>
+    </p:spTree>
+    <p:extLst>
+      <p:ext uri="{BB962C8B-B14F-4D97-AF65-F5344CB8AC3E}">
+        <p14:creationId xmlns:p14="http://schemas.microsoft.com/office/powerpoint/2010/main" val="487434153"/>
+      </p:ext>
+    </p:extLst>
+  </p:cSld>
+  <p:clrMapOvr>
+    <a:masterClrMapping/>
+  </p:clrMapOvr>
+</p:sld>
+</file>
+
+<file path=ppt/slides/slide22.xml><?xml version="1.0" encoding="utf-8"?>
+<p:sld xmlns:a="http://schemas.openxmlformats.org/drawingml/2006/main" xmlns:r="http://schemas.openxmlformats.org/officeDocument/2006/relationships" xmlns:p="http://schemas.openxmlformats.org/presentationml/2006/main">
+  <p:cSld>
+    <p:spTree>
+      <p:nvGrpSpPr>
+        <p:cNvPr id="1" name="">
+          <a:extLst>
+            <a:ext uri="{FF2B5EF4-FFF2-40B4-BE49-F238E27FC236}">
+              <a16:creationId xmlns:a16="http://schemas.microsoft.com/office/drawing/2014/main" id="{828078A8-1C8D-CC17-F403-AD419F1D491B}"/>
+            </a:ext>
+          </a:extLst>
+        </p:cNvPr>
+        <p:cNvGrpSpPr/>
+        <p:nvPr/>
+      </p:nvGrpSpPr>
+      <p:grpSpPr>
+        <a:xfrm>
+          <a:off x="0" y="0"/>
+          <a:ext cx="0" cy="0"/>
+          <a:chOff x="0" y="0"/>
+          <a:chExt cx="0" cy="0"/>
+        </a:xfrm>
+      </p:grpSpPr>
+      <p:sp>
+        <p:nvSpPr>
+          <p:cNvPr id="2" name="Title 1">
+            <a:extLst>
+              <a:ext uri="{FF2B5EF4-FFF2-40B4-BE49-F238E27FC236}">
+                <a16:creationId xmlns:a16="http://schemas.microsoft.com/office/drawing/2014/main" id="{D80E3296-FFC2-33B3-4F11-56B331B595B9}"/>
+              </a:ext>
+            </a:extLst>
+          </p:cNvPr>
+          <p:cNvSpPr>
+            <a:spLocks noGrp="1"/>
+          </p:cNvSpPr>
+          <p:nvPr>
+            <p:ph type="title"/>
+          </p:nvPr>
+        </p:nvSpPr>
+        <p:spPr/>
+        <p:txBody>
+          <a:bodyPr/>
+          <a:lstStyle/>
+          <a:p>
+            <a:r>
+              <a:rPr lang="da-DK" dirty="0"/>
+              <a:t>Q  &amp; A</a:t>
+            </a:r>
+          </a:p>
+        </p:txBody>
+      </p:sp>
+      <p:sp>
+        <p:nvSpPr>
+          <p:cNvPr id="3" name="Content Placeholder 2">
+            <a:extLst>
+              <a:ext uri="{FF2B5EF4-FFF2-40B4-BE49-F238E27FC236}">
+                <a16:creationId xmlns:a16="http://schemas.microsoft.com/office/drawing/2014/main" id="{14A3AC6A-31BA-D5A6-ADBD-A91781F85AE1}"/>
+              </a:ext>
+            </a:extLst>
+          </p:cNvPr>
+          <p:cNvSpPr>
+            <a:spLocks noGrp="1"/>
+          </p:cNvSpPr>
+          <p:nvPr>
+            <p:ph idx="1"/>
+          </p:nvPr>
+        </p:nvSpPr>
+        <p:spPr/>
+        <p:txBody>
+          <a:bodyPr>
+            <a:normAutofit lnSpcReduction="10000"/>
+          </a:bodyPr>
+          <a:lstStyle/>
+          <a:p>
+            <a:r>
+              <a:rPr lang="da-DK" sz="3200" dirty="0"/>
+              <a:t>Handling </a:t>
+            </a:r>
+            <a:r>
+              <a:rPr lang="da-DK" sz="3200" dirty="0" err="1"/>
+              <a:t>destructive</a:t>
+            </a:r>
+            <a:r>
+              <a:rPr lang="da-DK" sz="3200" dirty="0"/>
+              <a:t> </a:t>
+            </a:r>
+            <a:r>
+              <a:rPr lang="da-DK" sz="3200" dirty="0" err="1"/>
+              <a:t>schema</a:t>
+            </a:r>
+            <a:r>
+              <a:rPr lang="da-DK" sz="3200" dirty="0"/>
+              <a:t> </a:t>
+            </a:r>
+            <a:r>
+              <a:rPr lang="da-DK" sz="3200" dirty="0" err="1"/>
+              <a:t>changes</a:t>
+            </a:r>
+            <a:r>
+              <a:rPr lang="da-DK" sz="3200" dirty="0"/>
+              <a:t>?</a:t>
+            </a:r>
+          </a:p>
+          <a:p>
+            <a:r>
+              <a:rPr lang="da-DK" sz="3200" dirty="0"/>
+              <a:t>How do I ”seed data” to </a:t>
+            </a:r>
+            <a:r>
+              <a:rPr lang="da-DK" sz="3200" dirty="0" err="1"/>
+              <a:t>my</a:t>
+            </a:r>
+            <a:r>
+              <a:rPr lang="da-DK" sz="3200" dirty="0"/>
+              <a:t> database </a:t>
+            </a:r>
+            <a:r>
+              <a:rPr lang="da-DK" sz="3200" dirty="0" err="1"/>
+              <a:t>using</a:t>
+            </a:r>
+            <a:r>
+              <a:rPr lang="da-DK" sz="3200" dirty="0"/>
+              <a:t> a .</a:t>
+            </a:r>
+            <a:r>
+              <a:rPr lang="da-DK" sz="3200" dirty="0" err="1"/>
+              <a:t>dacpac</a:t>
+            </a:r>
+            <a:r>
+              <a:rPr lang="da-DK" sz="3200" dirty="0"/>
+              <a:t>?</a:t>
+            </a:r>
+          </a:p>
+          <a:p>
+            <a:r>
+              <a:rPr lang="da-DK" sz="3200" dirty="0"/>
+              <a:t>I </a:t>
+            </a:r>
+            <a:r>
+              <a:rPr lang="da-DK" sz="3200" dirty="0" err="1"/>
+              <a:t>use</a:t>
+            </a:r>
+            <a:r>
+              <a:rPr lang="da-DK" sz="3200" dirty="0"/>
+              <a:t> </a:t>
+            </a:r>
+            <a:r>
+              <a:rPr lang="da-DK" sz="3200" dirty="0" err="1"/>
+              <a:t>Postgres</a:t>
+            </a:r>
+            <a:r>
+              <a:rPr lang="da-DK" sz="3200" dirty="0"/>
+              <a:t> / Oracle /MySQL – </a:t>
+            </a:r>
+            <a:r>
+              <a:rPr lang="da-DK" sz="3200" dirty="0" err="1"/>
+              <a:t>can</a:t>
+            </a:r>
+            <a:r>
+              <a:rPr lang="da-DK" sz="3200" dirty="0"/>
+              <a:t> I </a:t>
+            </a:r>
+            <a:r>
+              <a:rPr lang="da-DK" sz="3200" dirty="0" err="1"/>
+              <a:t>use</a:t>
+            </a:r>
+            <a:r>
+              <a:rPr lang="da-DK" sz="3200" dirty="0"/>
+              <a:t> </a:t>
+            </a:r>
+            <a:r>
+              <a:rPr lang="da-DK" sz="3200" dirty="0" err="1"/>
+              <a:t>this</a:t>
+            </a:r>
+            <a:r>
+              <a:rPr lang="da-DK" sz="3200" dirty="0"/>
+              <a:t>?</a:t>
+            </a:r>
+          </a:p>
+          <a:p>
+            <a:r>
+              <a:rPr lang="da-DK" sz="3200" dirty="0" err="1"/>
+              <a:t>Does</a:t>
+            </a:r>
+            <a:r>
+              <a:rPr lang="da-DK" sz="3200" dirty="0"/>
+              <a:t> it </a:t>
+            </a:r>
+            <a:r>
+              <a:rPr lang="da-DK" sz="3200" dirty="0" err="1"/>
+              <a:t>work</a:t>
+            </a:r>
+            <a:r>
+              <a:rPr lang="da-DK" sz="3200" dirty="0"/>
+              <a:t> on </a:t>
+            </a:r>
+            <a:r>
+              <a:rPr lang="da-DK" sz="3200" dirty="0" err="1"/>
+              <a:t>Azure</a:t>
+            </a:r>
+            <a:r>
+              <a:rPr lang="da-DK" sz="3200" dirty="0"/>
+              <a:t> SQL Databases? </a:t>
+            </a:r>
+            <a:r>
+              <a:rPr lang="da-DK" sz="3200" dirty="0" err="1"/>
+              <a:t>Sharing</a:t>
+            </a:r>
+            <a:r>
+              <a:rPr lang="da-DK" sz="3200" dirty="0"/>
+              <a:t> parts of a database (</a:t>
+            </a:r>
+            <a:r>
+              <a:rPr lang="da-DK" sz="3200" dirty="0" err="1"/>
+              <a:t>f.ex</a:t>
+            </a:r>
+            <a:r>
+              <a:rPr lang="da-DK" sz="3200" dirty="0"/>
+              <a:t>. </a:t>
+            </a:r>
+            <a:r>
+              <a:rPr lang="da-DK" sz="3200" dirty="0" err="1"/>
+              <a:t>monitoring</a:t>
+            </a:r>
+            <a:r>
+              <a:rPr lang="da-DK" sz="3200" dirty="0"/>
+              <a:t>) ?</a:t>
+            </a:r>
+          </a:p>
+          <a:p>
+            <a:r>
+              <a:rPr lang="da-DK" sz="3200" dirty="0" err="1"/>
+              <a:t>What</a:t>
+            </a:r>
+            <a:r>
+              <a:rPr lang="da-DK" sz="3200" dirty="0"/>
+              <a:t> </a:t>
+            </a:r>
+            <a:r>
+              <a:rPr lang="da-DK" sz="3200" dirty="0" err="1"/>
+              <a:t>if</a:t>
+            </a:r>
+            <a:r>
+              <a:rPr lang="da-DK" sz="3200" dirty="0"/>
+              <a:t> </a:t>
+            </a:r>
+            <a:r>
+              <a:rPr lang="da-DK" sz="3200" dirty="0" err="1"/>
+              <a:t>my</a:t>
+            </a:r>
+            <a:r>
+              <a:rPr lang="da-DK" sz="3200" dirty="0"/>
+              <a:t> </a:t>
+            </a:r>
+            <a:r>
+              <a:rPr lang="da-DK" sz="3200" dirty="0" err="1"/>
+              <a:t>db</a:t>
+            </a:r>
+            <a:r>
+              <a:rPr lang="da-DK" sz="3200" dirty="0"/>
+              <a:t> has </a:t>
+            </a:r>
+            <a:r>
+              <a:rPr lang="da-DK" sz="3200" dirty="0" err="1"/>
+              <a:t>dependencies</a:t>
+            </a:r>
+            <a:r>
+              <a:rPr lang="da-DK" sz="3200" dirty="0"/>
+              <a:t> on </a:t>
+            </a:r>
+            <a:r>
+              <a:rPr lang="da-DK" sz="3200" dirty="0" err="1"/>
+              <a:t>other</a:t>
+            </a:r>
+            <a:r>
+              <a:rPr lang="da-DK" sz="3200" dirty="0"/>
+              <a:t> database?</a:t>
+            </a:r>
+          </a:p>
+          <a:p>
+            <a:r>
+              <a:rPr lang="da-DK" sz="3200" dirty="0"/>
+              <a:t>How </a:t>
+            </a:r>
+            <a:r>
+              <a:rPr lang="da-DK" sz="3200" dirty="0" err="1"/>
+              <a:t>would</a:t>
+            </a:r>
+            <a:r>
+              <a:rPr lang="da-DK" sz="3200" dirty="0"/>
+              <a:t> </a:t>
+            </a:r>
+            <a:r>
+              <a:rPr lang="da-DK" sz="3200" dirty="0" err="1"/>
+              <a:t>this</a:t>
+            </a:r>
+            <a:r>
+              <a:rPr lang="da-DK" sz="3200" dirty="0"/>
+              <a:t> </a:t>
+            </a:r>
+            <a:r>
+              <a:rPr lang="da-DK" sz="3200" dirty="0" err="1"/>
+              <a:t>work</a:t>
+            </a:r>
+            <a:r>
+              <a:rPr lang="da-DK" sz="3200" dirty="0"/>
+              <a:t> with EF Core?</a:t>
+            </a:r>
+          </a:p>
+          <a:p>
+            <a:r>
+              <a:rPr lang="da-DK" sz="3200" dirty="0"/>
+              <a:t>How </a:t>
+            </a:r>
+            <a:r>
+              <a:rPr lang="da-DK" sz="3200" dirty="0" err="1"/>
+              <a:t>about</a:t>
+            </a:r>
+            <a:r>
+              <a:rPr lang="da-DK" sz="3200" dirty="0"/>
+              <a:t> .NET </a:t>
+            </a:r>
+            <a:r>
+              <a:rPr lang="da-DK" sz="3200" dirty="0" err="1"/>
+              <a:t>Aspire</a:t>
+            </a:r>
+            <a:r>
+              <a:rPr lang="da-DK" sz="3200" dirty="0"/>
+              <a:t>?</a:t>
+            </a:r>
+          </a:p>
+          <a:p>
+            <a:endParaRPr lang="da-DK" sz="3200" dirty="0"/>
+          </a:p>
+          <a:p>
+            <a:pPr marL="0" indent="0">
+              <a:buNone/>
+            </a:pPr>
+            <a:endParaRPr lang="da-DK" sz="3200" dirty="0"/>
+          </a:p>
+        </p:txBody>
+      </p:sp>
+    </p:spTree>
+    <p:extLst>
+      <p:ext uri="{BB962C8B-B14F-4D97-AF65-F5344CB8AC3E}">
+        <p14:creationId xmlns:p14="http://schemas.microsoft.com/office/powerpoint/2010/main" val="3573977736"/>
+      </p:ext>
+    </p:extLst>
+  </p:cSld>
+  <p:clrMapOvr>
+    <a:masterClrMapping/>
+  </p:clrMapOvr>
+</p:sld>
+</file>
+
+<file path=ppt/slides/slide3.xml><?xml version="1.0" encoding="utf-8"?>
 <p:sld xmlns:a="http://schemas.openxmlformats.org/drawingml/2006/main" xmlns:r="http://schemas.openxmlformats.org/officeDocument/2006/relationships" xmlns:p="http://schemas.openxmlformats.org/presentationml/2006/main">
   <p:cSld>
     <p:spTree>
@@ -25727,7 +26638,7 @@
 </p:sld>
 </file>
 
-<file path=ppt/slides/slide3.xml><?xml version="1.0" encoding="utf-8"?>
+<file path=ppt/slides/slide4.xml><?xml version="1.0" encoding="utf-8"?>
 <p:sld xmlns:a="http://schemas.openxmlformats.org/drawingml/2006/main" xmlns:r="http://schemas.openxmlformats.org/officeDocument/2006/relationships" xmlns:p="http://schemas.openxmlformats.org/presentationml/2006/main">
   <p:cSld>
     <p:spTree>
@@ -25817,7 +26728,7 @@
 </p:sld>
 </file>
 
-<file path=ppt/slides/slide4.xml><?xml version="1.0" encoding="utf-8"?>
+<file path=ppt/slides/slide5.xml><?xml version="1.0" encoding="utf-8"?>
 <p:sld xmlns:a="http://schemas.openxmlformats.org/drawingml/2006/main" xmlns:r="http://schemas.openxmlformats.org/officeDocument/2006/relationships" xmlns:p="http://schemas.openxmlformats.org/presentationml/2006/main">
   <p:cSld>
     <p:spTree>
@@ -25924,7 +26835,7 @@
 </p:sld>
 </file>
 
-<file path=ppt/slides/slide5.xml><?xml version="1.0" encoding="utf-8"?>
+<file path=ppt/slides/slide6.xml><?xml version="1.0" encoding="utf-8"?>
 <p:sld xmlns:a="http://schemas.openxmlformats.org/drawingml/2006/main" xmlns:r="http://schemas.openxmlformats.org/officeDocument/2006/relationships" xmlns:p="http://schemas.openxmlformats.org/presentationml/2006/main">
   <p:cSld>
     <p:bg>
@@ -26437,7 +27348,7 @@
 </p:sld>
 </file>
 
-<file path=ppt/slides/slide6.xml><?xml version="1.0" encoding="utf-8"?>
+<file path=ppt/slides/slide7.xml><?xml version="1.0" encoding="utf-8"?>
 <p:sld xmlns:a="http://schemas.openxmlformats.org/drawingml/2006/main" xmlns:r="http://schemas.openxmlformats.org/officeDocument/2006/relationships" xmlns:p="http://schemas.openxmlformats.org/presentationml/2006/main">
   <p:cSld>
     <p:spTree>
@@ -26568,7 +27479,7 @@
 </p:sld>
 </file>
 
-<file path=ppt/slides/slide7.xml><?xml version="1.0" encoding="utf-8"?>
+<file path=ppt/slides/slide8.xml><?xml version="1.0" encoding="utf-8"?>
 <p:sld xmlns:a="http://schemas.openxmlformats.org/drawingml/2006/main" xmlns:r="http://schemas.openxmlformats.org/officeDocument/2006/relationships" xmlns:p="http://schemas.openxmlformats.org/presentationml/2006/main">
   <p:cSld>
     <p:spTree>
@@ -26686,7 +27597,7 @@
 </p:sld>
 </file>
 
-<file path=ppt/slides/slide8.xml><?xml version="1.0" encoding="utf-8"?>
+<file path=ppt/slides/slide9.xml><?xml version="1.0" encoding="utf-8"?>
 <p:sld xmlns:a="http://schemas.openxmlformats.org/drawingml/2006/main" xmlns:r="http://schemas.openxmlformats.org/officeDocument/2006/relationships" xmlns:p="http://schemas.openxmlformats.org/presentationml/2006/main">
   <p:cSld>
     <p:spTree>
@@ -26808,111 +27719,6 @@
     <p:extLst>
       <p:ext uri="{BB962C8B-B14F-4D97-AF65-F5344CB8AC3E}">
         <p14:creationId xmlns:p14="http://schemas.microsoft.com/office/powerpoint/2010/main" val="1709857564"/>
-      </p:ext>
-    </p:extLst>
-  </p:cSld>
-  <p:clrMapOvr>
-    <a:masterClrMapping/>
-  </p:clrMapOvr>
-</p:sld>
-</file>
-
-<file path=ppt/slides/slide9.xml><?xml version="1.0" encoding="utf-8"?>
-<p:sld xmlns:a="http://schemas.openxmlformats.org/drawingml/2006/main" xmlns:r="http://schemas.openxmlformats.org/officeDocument/2006/relationships" xmlns:p="http://schemas.openxmlformats.org/presentationml/2006/main">
-  <p:cSld>
-    <p:spTree>
-      <p:nvGrpSpPr>
-        <p:cNvPr id="1" name=""/>
-        <p:cNvGrpSpPr/>
-        <p:nvPr/>
-      </p:nvGrpSpPr>
-      <p:grpSpPr>
-        <a:xfrm>
-          <a:off x="0" y="0"/>
-          <a:ext cx="0" cy="0"/>
-          <a:chOff x="0" y="0"/>
-          <a:chExt cx="0" cy="0"/>
-        </a:xfrm>
-      </p:grpSpPr>
-      <p:sp>
-        <p:nvSpPr>
-          <p:cNvPr id="2" name="Title 1">
-            <a:extLst>
-              <a:ext uri="{FF2B5EF4-FFF2-40B4-BE49-F238E27FC236}">
-                <a16:creationId xmlns:a16="http://schemas.microsoft.com/office/drawing/2014/main" id="{E3403FCE-6728-50EF-4711-490852A5B2F1}"/>
-              </a:ext>
-            </a:extLst>
-          </p:cNvPr>
-          <p:cNvSpPr>
-            <a:spLocks noGrp="1"/>
-          </p:cNvSpPr>
-          <p:nvPr>
-            <p:ph type="title"/>
-          </p:nvPr>
-        </p:nvSpPr>
-        <p:spPr/>
-        <p:txBody>
-          <a:bodyPr/>
-          <a:lstStyle/>
-          <a:p>
-            <a:r>
-              <a:rPr lang="da-DK" dirty="0"/>
-              <a:t>Authoring</a:t>
-            </a:r>
-          </a:p>
-        </p:txBody>
-      </p:sp>
-      <p:sp>
-        <p:nvSpPr>
-          <p:cNvPr id="3" name="Content Placeholder 2">
-            <a:extLst>
-              <a:ext uri="{FF2B5EF4-FFF2-40B4-BE49-F238E27FC236}">
-                <a16:creationId xmlns:a16="http://schemas.microsoft.com/office/drawing/2014/main" id="{72E47B84-5EF3-4B0A-82B3-22C34297B1BE}"/>
-              </a:ext>
-            </a:extLst>
-          </p:cNvPr>
-          <p:cNvSpPr>
-            <a:spLocks noGrp="1"/>
-          </p:cNvSpPr>
-          <p:nvPr>
-            <p:ph idx="1"/>
-          </p:nvPr>
-        </p:nvSpPr>
-        <p:spPr/>
-        <p:txBody>
-          <a:bodyPr/>
-          <a:lstStyle/>
-          <a:p>
-            <a:r>
-              <a:rPr lang="da-DK" dirty="0"/>
-              <a:t>SSMS .</a:t>
-            </a:r>
-            <a:r>
-              <a:rPr lang="da-DK" dirty="0" err="1"/>
-              <a:t>sqlproj</a:t>
-            </a:r>
-            <a:endParaRPr lang="da-DK" dirty="0"/>
-          </a:p>
-          <a:p>
-            <a:r>
-              <a:rPr lang="da-DK" dirty="0"/>
-              <a:t>Demo (import, properties, </a:t>
-            </a:r>
-            <a:r>
-              <a:rPr lang="da-DK" dirty="0" err="1"/>
-              <a:t>build</a:t>
-            </a:r>
-            <a:r>
-              <a:rPr lang="da-DK" dirty="0"/>
-              <a:t>)</a:t>
-            </a:r>
-          </a:p>
-        </p:txBody>
-      </p:sp>
-    </p:spTree>
-    <p:extLst>
-      <p:ext uri="{BB962C8B-B14F-4D97-AF65-F5344CB8AC3E}">
-        <p14:creationId xmlns:p14="http://schemas.microsoft.com/office/powerpoint/2010/main" val="641704741"/>
       </p:ext>
     </p:extLst>
   </p:cSld>
